--- a/library/a03-video-planning/a03-video-planning.pptx
+++ b/library/a03-video-planning/a03-video-planning.pptx
@@ -2658,84 +2658,6 @@
       </p:sp>
       <p:sp>
         <p:nvSpPr>
-          <p:cNvPr id="9" name="Text 7"/>
-          <p:cNvSpPr txBox="1"/>
-          <p:nvPr/>
-        </p:nvSpPr>
-        <p:spPr>
-          <a:xfrm>
-            <a:off x="3320196" y="4988093"/>
-            <a:ext cx="1867205" cy="228600"/>
-          </a:xfrm>
-          <a:prstGeom prst="rect">
-            <a:avLst/>
-          </a:prstGeom>
-          <a:noFill/>
-          <a:ln/>
-        </p:spPr>
-        <p:txBody>
-          <a:bodyPr wrap="square" lIns="0" tIns="0" rIns="0" bIns="0" rtlCol="0" anchor="ctr"/>
-          <a:lstStyle/>
-          <a:p>
-            <a:pPr marL="0" indent="0" algn="l">
-              <a:buNone/>
-            </a:pPr>
-            <a:r>
-              <a:rPr lang="en-US" sz="1200" kern="0" spc="38" dirty="0">
-                <a:solidFill>
-                  <a:srgbClr val="000000"/>
-                </a:solidFill>
-                <a:latin typeface="Noto Sans KR" pitchFamily="34" charset="0"/>
-                <a:ea typeface="Noto Sans KR" pitchFamily="34" charset="-122"/>
-                <a:cs typeface="Noto Sans KR" pitchFamily="34" charset="-120"/>
-              </a:rPr>
-              <a:t>DURATION</a:t>
-            </a:r>
-            <a:endParaRPr lang="en-US" sz="1200" dirty="0"/>
-          </a:p>
-        </p:txBody>
-      </p:sp>
-      <p:sp>
-        <p:nvSpPr>
-          <p:cNvPr id="10" name="Text 8"/>
-          <p:cNvSpPr txBox="1"/>
-          <p:nvPr/>
-        </p:nvSpPr>
-        <p:spPr>
-          <a:xfrm>
-            <a:off x="3320196" y="5255098"/>
-            <a:ext cx="1954987" cy="257861"/>
-          </a:xfrm>
-          <a:prstGeom prst="rect">
-            <a:avLst/>
-          </a:prstGeom>
-          <a:noFill/>
-          <a:ln/>
-        </p:spPr>
-        <p:txBody>
-          <a:bodyPr wrap="square" lIns="0" tIns="0" rIns="0" bIns="0" rtlCol="0" anchor="ctr"/>
-          <a:lstStyle/>
-          <a:p>
-            <a:pPr marL="0" indent="0" algn="l">
-              <a:buNone/>
-            </a:pPr>
-            <a:r>
-              <a:rPr lang="en-US" sz="1300" b="1" kern="0" spc="38" dirty="0">
-                <a:solidFill>
-                  <a:srgbClr val="000000"/>
-                </a:solidFill>
-                <a:latin typeface="Noto Sans KR" pitchFamily="34" charset="0"/>
-                <a:ea typeface="Noto Sans KR" pitchFamily="34" charset="-122"/>
-                <a:cs typeface="Noto Sans KR" pitchFamily="34" charset="-120"/>
-              </a:rPr>
-              <a:t>60 MINUTE SESSION</a:t>
-            </a:r>
-            <a:endParaRPr lang="en-US" sz="1300" dirty="0"/>
-          </a:p>
-        </p:txBody>
-      </p:sp>
-      <p:sp>
-        <p:nvSpPr>
           <p:cNvPr id="11" name="Shape 9"/>
           <p:cNvSpPr/>
           <p:nvPr/>
@@ -2977,7 +2899,7 @@
                   <a:ea typeface="Noto Sans KR" pitchFamily="34" charset="-122"/>
                   <a:cs typeface="Noto Sans KR" pitchFamily="34" charset="-120"/>
                 </a:rPr>
-                <a:t>이 애 본 </a:t>
+                <a:t>이애본</a:t>
               </a:r>
               <a:r>
                 <a:rPr lang="ko-KR" altLang="en-US" sz="1300" dirty="0">
@@ -2988,8 +2910,18 @@
                   <a:ea typeface="Noto Sans KR" pitchFamily="34" charset="-122"/>
                   <a:cs typeface="Noto Sans KR" pitchFamily="34" charset="-120"/>
                 </a:rPr>
-                <a:t> </a:t>
+                <a:t/>
               </a:r>
+              <a:br>
+                <a:rPr lang="en-US" altLang="ko-KR" sz="1300" dirty="0">
+                  <a:solidFill>
+                    <a:srgbClr val="000000"/>
+                  </a:solidFill>
+                  <a:latin typeface="Noto Sans KR" pitchFamily="34" charset="0"/>
+                  <a:ea typeface="Noto Sans KR" pitchFamily="34" charset="-122"/>
+                  <a:cs typeface="Noto Sans KR" pitchFamily="34" charset="-120"/>
+                </a:rPr>
+              </a:br>
               <a:r>
                 <a:rPr lang="en-US" altLang="ko-KR" sz="1300" dirty="0">
                   <a:solidFill>
@@ -3011,7 +2943,7 @@
                   <a:cs typeface="Noto Sans KR" pitchFamily="34" charset="-120"/>
                   <a:hlinkClick r:id="rId4"/>
                 </a:rPr>
-                <a:t>aebon@hs.ac.kr</a:t>
+                <a:t>aebon@dreamitbiz.com</a:t>
               </a:r>
               <a:r>
                 <a:rPr lang="en-US" altLang="ko-KR" sz="1300" dirty="0">
@@ -3038,7 +2970,7 @@
                   <a:ea typeface="Noto Sans KR" pitchFamily="34" charset="-122"/>
                   <a:cs typeface="Noto Sans KR" pitchFamily="34" charset="-120"/>
                 </a:rPr>
-                <a:t>한신대학교 </a:t>
+                <a:t>드림아이티비즈(DreamIT Biz)</a:t>
               </a:r>
               <a:r>
                 <a:rPr lang="en-US" altLang="ko-KR" sz="1400" dirty="0">
@@ -3049,7 +2981,7 @@
                   <a:ea typeface="Noto Sans KR" pitchFamily="34" charset="-122"/>
                   <a:cs typeface="Noto Sans KR" pitchFamily="34" charset="-120"/>
                 </a:rPr>
-                <a:t>AI.SW</a:t>
+                <a:t/>
               </a:r>
               <a:r>
                 <a:rPr lang="ko-KR" altLang="en-US" sz="1400" dirty="0">
@@ -3060,7 +2992,7 @@
                   <a:ea typeface="Noto Sans KR" pitchFamily="34" charset="-122"/>
                   <a:cs typeface="Noto Sans KR" pitchFamily="34" charset="-120"/>
                 </a:rPr>
-                <a:t>대학</a:t>
+                <a:t/>
               </a:r>
               <a:r>
                 <a:rPr lang="ko-KR" altLang="en-US" sz="1300" dirty="0">
@@ -3322,7 +3254,7 @@
                 </a:solidFill>
                 <a:latin typeface="Pretendard"/>
               </a:rPr>
-              <a:t>© 2026 이애본(드림아이티비즈) · useful-ai.dreamitbiz.com · 교육 목적 비영리 이용 · 출처 표기</a:t>
+              <a:t>© 2026 이애본 · 홍문원(洪文院) 발행 · CC BY-NC-ND 4.0 · useful-ai.dreamitbiz.com</a:t>
             </a:r>
           </a:p>
         </p:txBody>
@@ -4520,7 +4452,7 @@
                 </a:solidFill>
                 <a:latin typeface="Pretendard"/>
               </a:rPr>
-              <a:t>© 2026 이애본(드림아이티비즈) · useful-ai.dreamitbiz.com · 교육 목적 비영리 이용 · 출처 표기</a:t>
+              <a:t>© 2026 이애본 · 홍문원(洪文院) 발행 · CC BY-NC-ND 4.0 · useful-ai.dreamitbiz.com</a:t>
             </a:r>
           </a:p>
         </p:txBody>
@@ -5803,7 +5735,7 @@
                 </a:solidFill>
                 <a:latin typeface="Pretendard"/>
               </a:rPr>
-              <a:t>© 2026 이애본(드림아이티비즈) · useful-ai.dreamitbiz.com · 교육 목적 비영리 이용 · 출처 표기</a:t>
+              <a:t>© 2026 이애본 · 홍문원(洪文院) 발행 · CC BY-NC-ND 4.0 · useful-ai.dreamitbiz.com</a:t>
             </a:r>
           </a:p>
         </p:txBody>
@@ -6932,7 +6864,7 @@
                 </a:solidFill>
                 <a:latin typeface="Pretendard"/>
               </a:rPr>
-              <a:t>© 2026 이애본(드림아이티비즈) · useful-ai.dreamitbiz.com · 교육 목적 비영리 이용 · 출처 표기</a:t>
+              <a:t>© 2026 이애본 · 홍문원(洪文院) 발행 · CC BY-NC-ND 4.0 · useful-ai.dreamitbiz.com</a:t>
             </a:r>
           </a:p>
         </p:txBody>
@@ -7190,7 +7122,7 @@
                   <a:ea typeface="Noto Sans KR" pitchFamily="34" charset="-122"/>
                   <a:cs typeface="Noto Sans KR" pitchFamily="34" charset="-120"/>
                 </a:rPr>
-                <a:t>대중교통이나 공공장소에서의 '무음 시청' 비율이 80% 이상입니다. </a:t>
+                <a:t>대중교통이나 공공장소에서는 소리를 끄고 보는 '무음 시청'이 흔합니다. </a:t>
               </a:r>
             </a:p>
             <a:p>
@@ -7738,7 +7670,7 @@
                 </a:solidFill>
                 <a:latin typeface="Pretendard"/>
               </a:rPr>
-              <a:t>© 2026 이애본(드림아이티비즈) · useful-ai.dreamitbiz.com · 교육 목적 비영리 이용 · 출처 표기</a:t>
+              <a:t>© 2026 이애본 · 홍문원(洪文院) 발행 · CC BY-NC-ND 4.0 · useful-ai.dreamitbiz.com</a:t>
             </a:r>
           </a:p>
         </p:txBody>
@@ -8196,7 +8128,7 @@
                 <a:ea typeface="Noto Sans KR" pitchFamily="34" charset="-122"/>
                 <a:cs typeface="Noto Sans KR" pitchFamily="34" charset="-120"/>
               </a:rPr>
-              <a:t>95% 이상의 정확도로 작업 시간을 단축합니다.</a:t>
+              <a:t>초안 자막을 자동으로 만들어 작업 시간을 단축합니다.</a:t>
             </a:r>
             <a:endParaRPr lang="en-US" sz="1200" dirty="0"/>
           </a:p>
@@ -9085,7 +9017,7 @@
                 </a:solidFill>
                 <a:latin typeface="Pretendard"/>
               </a:rPr>
-              <a:t>© 2026 이애본(드림아이티비즈) · useful-ai.dreamitbiz.com · 교육 목적 비영리 이용 · 출처 표기</a:t>
+              <a:t>© 2026 이애본 · 홍문원(洪文院) 발행 · CC BY-NC-ND 4.0 · useful-ai.dreamitbiz.com</a:t>
             </a:r>
           </a:p>
         </p:txBody>
@@ -10080,7 +10012,7 @@
                 </a:solidFill>
                 <a:latin typeface="Pretendard"/>
               </a:rPr>
-              <a:t>© 2026 이애본(드림아이티비즈) · useful-ai.dreamitbiz.com · 교육 목적 비영리 이용 · 출처 표기</a:t>
+              <a:t>© 2026 이애본 · 홍문원(洪文院) 발행 · CC BY-NC-ND 4.0 · useful-ai.dreamitbiz.com</a:t>
             </a:r>
           </a:p>
         </p:txBody>
@@ -11435,7 +11367,7 @@
                 </a:solidFill>
                 <a:latin typeface="Pretendard"/>
               </a:rPr>
-              <a:t>© 2026 이애본(드림아이티비즈) · useful-ai.dreamitbiz.com · 교육 목적 비영리 이용 · 출처 표기</a:t>
+              <a:t>© 2026 이애본 · 홍문원(洪文院) 발행 · CC BY-NC-ND 4.0 · useful-ai.dreamitbiz.com</a:t>
             </a:r>
           </a:p>
         </p:txBody>
@@ -12279,7 +12211,7 @@
                 </a:solidFill>
                 <a:latin typeface="Pretendard"/>
               </a:rPr>
-              <a:t>© 2026 이애본(드림아이티비즈) · useful-ai.dreamitbiz.com · 교육 목적 비영리 이용 · 출처 표기</a:t>
+              <a:t>© 2026 이애본 · 홍문원(洪文院) 발행 · CC BY-NC-ND 4.0 · useful-ai.dreamitbiz.com</a:t>
             </a:r>
           </a:p>
         </p:txBody>
@@ -13412,7 +13344,7 @@
                 </a:solidFill>
                 <a:latin typeface="Pretendard"/>
               </a:rPr>
-              <a:t>© 2026 이애본(드림아이티비즈) · useful-ai.dreamitbiz.com · 교육 목적 비영리 이용 · 출처 표기</a:t>
+              <a:t>© 2026 이애본 · 홍문원(洪文院) 발행 · CC BY-NC-ND 4.0 · useful-ai.dreamitbiz.com</a:t>
             </a:r>
           </a:p>
         </p:txBody>
@@ -14809,7 +14741,7 @@
                 </a:solidFill>
                 <a:latin typeface="Pretendard"/>
               </a:rPr>
-              <a:t>© 2026 이애본(드림아이티비즈) · useful-ai.dreamitbiz.com · 교육 목적 비영리 이용 · 출처 표기</a:t>
+              <a:t>© 2026 이애본 · 홍문원(洪文院) 발행 · CC BY-NC-ND 4.0 · useful-ai.dreamitbiz.com</a:t>
             </a:r>
           </a:p>
         </p:txBody>
@@ -16449,7 +16381,7 @@
                 </a:solidFill>
                 <a:latin typeface="Pretendard"/>
               </a:rPr>
-              <a:t>© 2026 이애본(드림아이티비즈) · useful-ai.dreamitbiz.com · 교육 목적 비영리 이용 · 출처 표기</a:t>
+              <a:t>© 2026 이애본 · 홍문원(洪文院) 발행 · CC BY-NC-ND 4.0 · useful-ai.dreamitbiz.com</a:t>
             </a:r>
           </a:p>
         </p:txBody>
@@ -17654,7 +17586,7 @@
                 </a:solidFill>
                 <a:latin typeface="Pretendard"/>
               </a:rPr>
-              <a:t>© 2026 이애본(드림아이티비즈) · useful-ai.dreamitbiz.com · 교육 목적 비영리 이용 · 출처 표기</a:t>
+              <a:t>© 2026 이애본 · 홍문원(洪文院) 발행 · CC BY-NC-ND 4.0 · useful-ai.dreamitbiz.com</a:t>
             </a:r>
           </a:p>
         </p:txBody>
@@ -18691,7 +18623,7 @@
                 </a:solidFill>
                 <a:latin typeface="Pretendard"/>
               </a:rPr>
-              <a:t>© 2026 이애본(드림아이티비즈) · useful-ai.dreamitbiz.com · 교육 목적 비영리 이용 · 출처 표기</a:t>
+              <a:t>© 2026 이애본 · 홍문원(洪文院) 발행 · CC BY-NC-ND 4.0 · useful-ai.dreamitbiz.com</a:t>
             </a:r>
           </a:p>
         </p:txBody>
@@ -18946,7 +18878,7 @@
                 <a:ea typeface="Noto Sans KR" pitchFamily="34" charset="-122"/>
                 <a:cs typeface="Noto Sans KR" pitchFamily="34" charset="-120"/>
               </a:rPr>
-              <a:t>무료</a:t>
+              <a:t>도구 리스트 (워크플로우 순서) — 무료 범위는 각 공식 페이지 참조(2026-10 기준)</a:t>
             </a:r>
             <a:r>
               <a:rPr lang="en-US" sz="1600" b="1" dirty="0">
@@ -18957,7 +18889,7 @@
                 <a:ea typeface="Noto Sans KR" pitchFamily="34" charset="-122"/>
                 <a:cs typeface="Noto Sans KR" pitchFamily="34" charset="-120"/>
               </a:rPr>
-              <a:t> 도구 리스트 (워크플로우 순서)</a:t>
+              <a:t/>
             </a:r>
             <a:endParaRPr lang="en-US" sz="1600" b="1" dirty="0"/>
           </a:p>
@@ -19993,57 +19925,14 @@
       </p:sp>
       <p:sp>
         <p:nvSpPr>
-          <p:cNvPr id="39" name="Shape 32"/>
-          <p:cNvSpPr/>
-          <p:nvPr/>
-        </p:nvSpPr>
-        <p:spPr>
-          <a:xfrm>
-            <a:off x="5321807" y="5676595"/>
-            <a:ext cx="3605262" cy="523951"/>
-          </a:xfrm>
-          <a:prstGeom prst="roundRect">
-            <a:avLst>
-              <a:gd name="adj" fmla="val 158655"/>
-            </a:avLst>
-          </a:prstGeom>
-          <a:solidFill>
-            <a:srgbClr val="FF6908"/>
-          </a:solidFill>
-          <a:ln w="12700">
-            <a:solidFill>
-              <a:srgbClr val="FFFFFF">
-                <a:alpha val="0"/>
-              </a:srgbClr>
-            </a:solidFill>
-            <a:prstDash val="solid"/>
-          </a:ln>
-          <a:effectLst>
-            <a:outerShdw blurRad="114300" dist="38100" dir="16200000" algn="bl" rotWithShape="0">
-              <a:srgbClr val="FF6908">
-                <a:alpha val="30000"/>
-              </a:srgbClr>
-            </a:outerShdw>
-          </a:effectLst>
-        </p:spPr>
-        <p:txBody>
-          <a:bodyPr/>
-          <a:lstStyle/>
-          <a:p>
-            <a:endParaRPr lang="ko-KR" altLang="en-US"/>
-          </a:p>
-        </p:txBody>
-      </p:sp>
-      <p:sp>
-        <p:nvSpPr>
-          <p:cNvPr id="40" name="Text 33"/>
+          <p:cNvPr id="42" name="Text 34"/>
           <p:cNvSpPr txBox="1"/>
           <p:nvPr/>
         </p:nvSpPr>
         <p:spPr>
           <a:xfrm>
-            <a:off x="5469547" y="5810098"/>
-            <a:ext cx="3435794" cy="280721"/>
+            <a:off x="8927069" y="5733997"/>
+            <a:ext cx="2348398" cy="157483"/>
           </a:xfrm>
           <a:prstGeom prst="rect">
             <a:avLst/>
@@ -20055,94 +19944,58 @@
           <a:bodyPr wrap="square" lIns="0" tIns="0" rIns="0" bIns="0" rtlCol="0" anchor="ctr"/>
           <a:lstStyle/>
           <a:p>
+            <a:pPr marL="0" indent="0" algn="r">
+              <a:buNone/>
+            </a:pPr>
+            <a:r>
+              <a:rPr lang="en-US" sz="1100" dirty="0">
+                <a:solidFill>
+                  <a:srgbClr val="666666"/>
+                </a:solidFill>
+                <a:latin typeface="Noto Sans KR" pitchFamily="34" charset="0"/>
+                <a:ea typeface="Noto Sans KR" pitchFamily="34" charset="-122"/>
+                <a:cs typeface="Noto Sans KR" pitchFamily="34" charset="-120"/>
+              </a:rPr>
+              <a:t>궁금한 점은 언제든 문의주세요</a:t>
+            </a:r>
+            <a:endParaRPr lang="en-US" sz="1100" dirty="0"/>
+          </a:p>
+        </p:txBody>
+      </p:sp>
+      <p:sp>
+        <p:nvSpPr>
+          <p:cNvPr id="43" name="Text 35"/>
+          <p:cNvSpPr txBox="1"/>
+          <p:nvPr/>
+        </p:nvSpPr>
+        <p:spPr>
+          <a:xfrm>
+            <a:off x="8687776" y="5984045"/>
+            <a:ext cx="2587690" cy="202786"/>
+          </a:xfrm>
+          <a:prstGeom prst="rect">
+            <a:avLst/>
+          </a:prstGeom>
+          <a:noFill/>
+          <a:ln/>
+        </p:spPr>
+        <p:txBody>
+          <a:bodyPr wrap="square" lIns="0" tIns="0" rIns="0" bIns="0" rtlCol="0" anchor="ctr"/>
+          <a:lstStyle/>
+          <a:p>
+            <a:pPr marL="0" indent="0" algn="r">
+              <a:buNone/>
+            </a:pPr>
             <a:r>
               <a:rPr lang="en-US" sz="1600" b="1" dirty="0">
                 <a:solidFill>
-                  <a:srgbClr val="FFFFFF"/>
+                  <a:srgbClr val="333333"/>
                 </a:solidFill>
                 <a:latin typeface="Pretendard" pitchFamily="34" charset="0"/>
                 <a:ea typeface="Pretendard" pitchFamily="34" charset="-122"/>
                 <a:cs typeface="Pretendard" pitchFamily="34" charset="-120"/>
               </a:rPr>
-              <a:t>https://padlet.com/aebon/contents26</a:t>
-            </a:r>
-            <a:endParaRPr lang="en-US" sz="1600" dirty="0"/>
-          </a:p>
-        </p:txBody>
-      </p:sp>
-      <p:sp>
-        <p:nvSpPr>
-          <p:cNvPr id="42" name="Text 34"/>
-          <p:cNvSpPr txBox="1"/>
-          <p:nvPr/>
-        </p:nvSpPr>
-        <p:spPr>
-          <a:xfrm>
-            <a:off x="8927069" y="5733997"/>
-            <a:ext cx="2348398" cy="157483"/>
-          </a:xfrm>
-          <a:prstGeom prst="rect">
-            <a:avLst/>
-          </a:prstGeom>
-          <a:noFill/>
-          <a:ln/>
-        </p:spPr>
-        <p:txBody>
-          <a:bodyPr wrap="square" lIns="0" tIns="0" rIns="0" bIns="0" rtlCol="0" anchor="ctr"/>
-          <a:lstStyle/>
-          <a:p>
-            <a:pPr marL="0" indent="0" algn="r">
-              <a:buNone/>
-            </a:pPr>
-            <a:r>
-              <a:rPr lang="en-US" sz="1100" dirty="0">
-                <a:solidFill>
-                  <a:srgbClr val="666666"/>
-                </a:solidFill>
-                <a:latin typeface="Noto Sans KR" pitchFamily="34" charset="0"/>
-                <a:ea typeface="Noto Sans KR" pitchFamily="34" charset="-122"/>
-                <a:cs typeface="Noto Sans KR" pitchFamily="34" charset="-120"/>
-              </a:rPr>
-              <a:t>궁금한 점은 언제든 문의주세요</a:t>
-            </a:r>
-            <a:endParaRPr lang="en-US" sz="1100" dirty="0"/>
-          </a:p>
-        </p:txBody>
-      </p:sp>
-      <p:sp>
-        <p:nvSpPr>
-          <p:cNvPr id="43" name="Text 35"/>
-          <p:cNvSpPr txBox="1"/>
-          <p:nvPr/>
-        </p:nvSpPr>
-        <p:spPr>
-          <a:xfrm>
-            <a:off x="8687776" y="5984045"/>
-            <a:ext cx="2587690" cy="202786"/>
-          </a:xfrm>
-          <a:prstGeom prst="rect">
-            <a:avLst/>
-          </a:prstGeom>
-          <a:noFill/>
-          <a:ln/>
-        </p:spPr>
-        <p:txBody>
-          <a:bodyPr wrap="square" lIns="0" tIns="0" rIns="0" bIns="0" rtlCol="0" anchor="ctr"/>
-          <a:lstStyle/>
-          <a:p>
-            <a:pPr marL="0" indent="0" algn="r">
-              <a:buNone/>
-            </a:pPr>
-            <a:r>
-              <a:rPr lang="en-US" sz="1600" b="1" dirty="0">
-                <a:solidFill>
-                  <a:srgbClr val="333333"/>
-                </a:solidFill>
-                <a:latin typeface="Pretendard" pitchFamily="34" charset="0"/>
-                <a:ea typeface="Pretendard" pitchFamily="34" charset="-122"/>
-                <a:cs typeface="Pretendard" pitchFamily="34" charset="-120"/>
-              </a:rPr>
-              <a:t>aebon@hs.ac.kr</a:t>
+              <a:t>aebon@dreamitbiz.com</a:t>
             </a:r>
             <a:endParaRPr lang="en-US" sz="1600" dirty="0"/>
           </a:p>
@@ -20313,7 +20166,7 @@
                 </a:solidFill>
                 <a:latin typeface="Pretendard"/>
               </a:rPr>
-              <a:t>© 2026 이애본(드림아이티비즈) · useful-ai.dreamitbiz.com · 교육 목적 비영리 이용 · 출처 표기</a:t>
+              <a:t>© 2026 이애본 · 홍문원(洪文院) 발행 · CC BY-NC-ND 4.0 · useful-ai.dreamitbiz.com</a:t>
             </a:r>
           </a:p>
         </p:txBody>
@@ -20618,7 +20471,7 @@
                 </a:solidFill>
                 <a:latin typeface="Pretendard"/>
               </a:rPr>
-              <a:t>3.  출처 표기 예: 이애본(드림아이티비즈), 「자료 제목」, useful-ai.dreamitbiz.com</a:t>
+              <a:t>3.  출처 표기 예: 이애본(드림아이티비즈), 「자료 제목」, 홍문원, useful-ai.dreamitbiz.com, CC BY-NC-ND 4.0</a:t>
             </a:r>
           </a:p>
           <a:p>
@@ -20695,7 +20548,7 @@
                 </a:solidFill>
                 <a:latin typeface="Pretendard"/>
               </a:rPr>
-              <a:t>© 2026 이애본(드림아이티비즈) · useful-ai.dreamitbiz.com · 교육 목적 비영리 이용 · 출처 표기</a:t>
+              <a:t>© 2026 이애본 · 홍문원(洪文院) 발행 · CC BY-NC-ND 4.0 · useful-ai.dreamitbiz.com</a:t>
             </a:r>
           </a:p>
         </p:txBody>
@@ -20923,7 +20776,7 @@
                 </a:solidFill>
                 <a:latin typeface="Pretendard"/>
               </a:rPr>
-              <a:t>저작권 · 이용 조건</a:t>
+              <a:t>저작권 · 이용 조건 (CC BY-NC-ND 4.0)</a:t>
             </a:r>
           </a:p>
         </p:txBody>
@@ -20962,7 +20815,7 @@
                 </a:solidFill>
                 <a:latin typeface="Pretendard"/>
               </a:rPr>
-              <a:t>1.  저작권 © 2026 이애본(드림아이티비즈 DreamIT Biz). 2026년 1월 「생성형 AI와 창의력·복합문제능력 향상 과정」 강의안을 공개용으로 다시 묶은 것입니다.</a:t>
+              <a:t>1.  저작권 © 2026 이애본(드림아이티비즈 DreamIT Biz). 발행 홍문원(洪文院, 출판사 신고번호 제2026-000026호). 2026년 1월 「생성형 AI와 창의력·복합문제능력 향상 과정」 강의안을 전자출판용으로 다시 묶은 것입니다. ISBN: 등록 후 기재.</a:t>
             </a:r>
           </a:p>
           <a:p>
@@ -20981,7 +20834,7 @@
                 </a:solidFill>
                 <a:latin typeface="Pretendard"/>
               </a:rPr>
-              <a:t>2.  교육 목적의 비영리 이용을 허용합니다 — 출처를 표기해 주세요.</a:t>
+              <a:t>2.  이 자료는 크리에이티브 커먼즈 저작자표시-비영리-변경금지 4.0 국제(CC BY-NC-ND 4.0) 라이선스를 따릅니다. creativecommons.org/licenses/by-nc-nd/4.0/deed.ko</a:t>
             </a:r>
           </a:p>
           <a:p>
@@ -21000,7 +20853,7 @@
                 </a:solidFill>
                 <a:latin typeface="Pretendard"/>
               </a:rPr>
-              <a:t>3.  재배포·판매·변형(내용 수정 후 배포)은 허용하지 않습니다. 필요하면 먼저 문의해 주세요.</a:t>
+              <a:t>3.  저작자 표시(BY): 출처를 밝히면 그대로 복사해 수업·강의·자습에 쓸 수 있습니다. 비영리(NC): 유료 강의·판매·광고 수익 목적에는 쓸 수 없습니다. 변경금지(ND): 내용을 고치거나 잘라 재조합해 배포할 수 없습니다.</a:t>
             </a:r>
           </a:p>
           <a:p>
@@ -21038,7 +20891,7 @@
                 </a:solidFill>
                 <a:latin typeface="Pretendard"/>
               </a:rPr>
-              <a:t>5.  문의 aebon@dreamitbiz.com · 카카오톡 ID aebon</a:t>
+              <a:t>5.  라이선스 범위 밖의 이용(영리·변형·2차 저작)은 먼저 문의해 주세요. aebon@dreamitbiz.com · 카카오톡 ID aebon</a:t>
             </a:r>
           </a:p>
         </p:txBody>
@@ -21077,7 +20930,7 @@
                 </a:solidFill>
                 <a:latin typeface="Pretendard"/>
               </a:rPr>
-              <a:t>© 2026 이애본(드림아이티비즈) · useful-ai.dreamitbiz.com · 교육 목적 비영리 이용 · 출처 표기</a:t>
+              <a:t>© 2026 이애본 · 홍문원(洪文院) 발행 · CC BY-NC-ND 4.0 · useful-ai.dreamitbiz.com</a:t>
             </a:r>
           </a:p>
         </p:txBody>
@@ -21401,7 +21254,7 @@
                 </a:solidFill>
                 <a:latin typeface="Pretendard"/>
               </a:rPr>
-              <a:t>© 2026 이애본(드림아이티비즈). 교육 목적 비영리 이용 · 출처 표기</a:t>
+              <a:t>© 2026 이애본 · 발행 홍문원(洪文院) · CC BY-NC-ND 4.0</a:t>
             </a:r>
           </a:p>
         </p:txBody>
@@ -21440,7 +21293,7 @@
                 </a:solidFill>
                 <a:latin typeface="Pretendard"/>
               </a:rPr>
-              <a:t>© 2026 이애본(드림아이티비즈) · useful-ai.dreamitbiz.com · 교육 목적 비영리 이용 · 출처 표기</a:t>
+              <a:t>© 2026 이애본 · 홍문원(洪文院) 발행 · CC BY-NC-ND 4.0 · useful-ai.dreamitbiz.com</a:t>
             </a:r>
           </a:p>
         </p:txBody>
@@ -21640,7 +21493,7 @@
                 <a:ea typeface="Noto Sans KR" pitchFamily="34" charset="-122"/>
                 <a:cs typeface="Noto Sans KR" pitchFamily="34" charset="-120"/>
               </a:rPr>
-              <a:t>최적 길이는 15–35초로, 첫 0–3초의 '후킹'이 이탈률을 결정하는 핵심 요소입니다. </a:t>
+              <a:t>숏폼은 짧은 길이 안에서 첫 몇 초의 '후킹'이 이탈률을 좌우합니다. </a:t>
             </a:r>
           </a:p>
           <a:p>
@@ -22201,7 +22054,7 @@
                 </a:solidFill>
                 <a:latin typeface="Pretendard"/>
               </a:rPr>
-              <a:t>© 2026 이애본(드림아이티비즈) · useful-ai.dreamitbiz.com · 교육 목적 비영리 이용 · 출처 표기</a:t>
+              <a:t>© 2026 이애본 · 홍문원(洪文院) 발행 · CC BY-NC-ND 4.0 · useful-ai.dreamitbiz.com</a:t>
             </a:r>
           </a:p>
         </p:txBody>
@@ -22430,7 +22283,7 @@
                 <a:ea typeface="Noto Sans KR" pitchFamily="34" charset="-122"/>
                 <a:cs typeface="Noto Sans KR" pitchFamily="34" charset="-120"/>
               </a:rPr>
-              <a:t>아이데이션부터 자막 생성까지 AI로 자동화하여 제작 속도를 2~3배 향상시키며, </a:t>
+              <a:t>아이데이션부터 자막 생성까지 AI로 자동화하여 제작 속도를 높이며, </a:t>
             </a:r>
           </a:p>
           <a:p>
@@ -22914,7 +22767,7 @@
                 </a:solidFill>
                 <a:latin typeface="Pretendard"/>
               </a:rPr>
-              <a:t>© 2026 이애본(드림아이티비즈) · useful-ai.dreamitbiz.com · 교육 목적 비영리 이용 · 출처 표기</a:t>
+              <a:t>© 2026 이애본 · 홍문원(洪文院) 발행 · CC BY-NC-ND 4.0 · useful-ai.dreamitbiz.com</a:t>
             </a:r>
           </a:p>
         </p:txBody>
@@ -24021,7 +23874,7 @@
                 </a:solidFill>
                 <a:latin typeface="Pretendard"/>
               </a:rPr>
-              <a:t>© 2026 이애본(드림아이티비즈) · useful-ai.dreamitbiz.com · 교육 목적 비영리 이용 · 출처 표기</a:t>
+              <a:t>© 2026 이애본 · 홍문원(洪文院) 발행 · CC BY-NC-ND 4.0 · useful-ai.dreamitbiz.com</a:t>
             </a:r>
           </a:p>
         </p:txBody>
@@ -24785,7 +24638,7 @@
                 <a:ea typeface="Noto Sans KR" pitchFamily="34" charset="-122"/>
                 <a:cs typeface="Noto Sans KR" pitchFamily="34" charset="-120"/>
               </a:rPr>
-              <a:t>완시율(Completion Rate) 35% 이상을 목표로 하세요. </a:t>
+              <a:t>완시율(Completion Rate)을 높이는 것을 목표로 하세요. </a:t>
             </a:r>
           </a:p>
           <a:p>
@@ -24931,7 +24784,7 @@
                 </a:solidFill>
                 <a:latin typeface="Pretendard"/>
               </a:rPr>
-              <a:t>© 2026 이애본(드림아이티비즈) · useful-ai.dreamitbiz.com · 교육 목적 비영리 이용 · 출처 표기</a:t>
+              <a:t>© 2026 이애본 · 홍문원(洪文院) 발행 · CC BY-NC-ND 4.0 · useful-ai.dreamitbiz.com</a:t>
             </a:r>
           </a:p>
         </p:txBody>
@@ -25377,7 +25230,7 @@
                 <a:ea typeface="Pretendard" pitchFamily="34" charset="-122"/>
                 <a:cs typeface="Pretendard" pitchFamily="34" charset="-120"/>
               </a:rPr>
-              <a:t>길이와 문체: 90-150자</a:t>
+              <a:t>길이와 문체: 짧게, 말하듯이</a:t>
             </a:r>
             <a:endParaRPr lang="en-US" sz="1800" dirty="0"/>
           </a:p>
@@ -25419,7 +25272,7 @@
                 <a:ea typeface="Noto Sans KR" pitchFamily="34" charset="-122"/>
                 <a:cs typeface="Noto Sans KR" pitchFamily="34" charset="-120"/>
               </a:rPr>
-              <a:t>1분 미만 숏폼에 최적화된 대본 길이는 공백 포함 90-150자입니다. </a:t>
+              <a:t>1분 미만 숏폼 대본은 소리 내어 읽어 보며 영상 길이에 맞춥니다. </a:t>
             </a:r>
           </a:p>
           <a:p>
@@ -25895,7 +25748,7 @@
                 </a:solidFill>
                 <a:latin typeface="Pretendard"/>
               </a:rPr>
-              <a:t>© 2026 이애본(드림아이티비즈) · useful-ai.dreamitbiz.com · 교육 목적 비영리 이용 · 출처 표기</a:t>
+              <a:t>© 2026 이애본 · 홍문원(洪文院) 발행 · CC BY-NC-ND 4.0 · useful-ai.dreamitbiz.com</a:t>
             </a:r>
           </a:p>
         </p:txBody>
@@ -26913,7 +26766,7 @@
                 <a:ea typeface="Pretendard" pitchFamily="34" charset="-122"/>
                 <a:cs typeface="Pretendard" pitchFamily="34" charset="-120"/>
               </a:rPr>
-              <a:t>0분 만에 끝내는 법 </a:t>
+              <a:t>30분 만에 끝내는 법 </a:t>
             </a:r>
           </a:p>
           <a:p>
@@ -27549,7 +27402,7 @@
                 </a:solidFill>
                 <a:latin typeface="Pretendard"/>
               </a:rPr>
-              <a:t>© 2026 이애본(드림아이티비즈) · useful-ai.dreamitbiz.com · 교육 목적 비영리 이용 · 출처 표기</a:t>
+              <a:t>© 2026 이애본 · 홍문원(洪文院) 발행 · CC BY-NC-ND 4.0 · useful-ai.dreamitbiz.com</a:t>
             </a:r>
           </a:p>
         </p:txBody>
@@ -28575,7 +28428,7 @@
                 </a:solidFill>
                 <a:latin typeface="Pretendard"/>
               </a:rPr>
-              <a:t>© 2026 이애본(드림아이티비즈) · useful-ai.dreamitbiz.com · 교육 목적 비영리 이용 · 출처 표기</a:t>
+              <a:t>© 2026 이애본 · 홍문원(洪文院) 발행 · CC BY-NC-ND 4.0 · useful-ai.dreamitbiz.com</a:t>
             </a:r>
           </a:p>
         </p:txBody>

--- a/library/a03-video-planning/a03-video-planning.pptx
+++ b/library/a03-video-planning/a03-video-planning.pptx
@@ -10090,7 +10090,7 @@
         <p:spPr>
           <a:xfrm>
             <a:off x="3220060" y="1126345"/>
-            <a:ext cx="2356452" cy="1094014"/>
+            <a:ext cx="2921000" cy="1094014"/>
           </a:xfrm>
           <a:prstGeom prst="rect">
             <a:avLst/>
@@ -14448,7 +14448,7 @@
         <p:spPr>
           <a:xfrm>
             <a:off x="5236769" y="5545836"/>
-            <a:ext cx="333756" cy="342900"/>
+            <a:ext cx="431800" cy="342900"/>
           </a:xfrm>
           <a:prstGeom prst="rect">
             <a:avLst/>
@@ -14835,7 +14835,7 @@
               <a:buNone/>
             </a:pPr>
             <a:r>
-              <a:rPr lang="en-US" sz="4800" b="1" dirty="0">
+              <a:rPr lang="en-US" sz="4200" b="1" dirty="0">
                 <a:solidFill>
                   <a:srgbClr val="FF6908"/>
                 </a:solidFill>
@@ -14969,7 +14969,7 @@
               <a:buNone/>
             </a:pPr>
             <a:r>
-              <a:rPr lang="en-US" sz="4800" b="1" dirty="0">
+              <a:rPr lang="en-US" sz="4200" b="1" dirty="0">
                 <a:solidFill>
                   <a:srgbClr val="FF6908"/>
                 </a:solidFill>
@@ -15103,7 +15103,7 @@
               <a:buNone/>
             </a:pPr>
             <a:r>
-              <a:rPr lang="en-US" sz="4800" b="1" dirty="0">
+              <a:rPr lang="en-US" sz="4200" b="1" dirty="0">
                 <a:solidFill>
                   <a:srgbClr val="FF6908"/>
                 </a:solidFill>
@@ -15237,7 +15237,7 @@
               <a:buNone/>
             </a:pPr>
             <a:r>
-              <a:rPr lang="en-US" sz="4800" b="1" dirty="0">
+              <a:rPr lang="en-US" sz="4200" b="1" dirty="0">
                 <a:solidFill>
                   <a:srgbClr val="FF6908"/>
                 </a:solidFill>
@@ -15371,7 +15371,7 @@
               <a:buNone/>
             </a:pPr>
             <a:r>
-              <a:rPr lang="en-US" sz="4800" b="1" dirty="0">
+              <a:rPr lang="en-US" sz="4200" b="1" dirty="0">
                 <a:solidFill>
                   <a:srgbClr val="FF6908"/>
                 </a:solidFill>
@@ -15505,7 +15505,7 @@
               <a:buNone/>
             </a:pPr>
             <a:r>
-              <a:rPr lang="en-US" sz="4800" b="1" dirty="0">
+              <a:rPr lang="en-US" sz="4200" b="1" dirty="0">
                 <a:solidFill>
                   <a:srgbClr val="FF6908"/>
                 </a:solidFill>
@@ -15639,7 +15639,7 @@
               <a:buNone/>
             </a:pPr>
             <a:r>
-              <a:rPr lang="en-US" sz="4800" b="1" dirty="0">
+              <a:rPr lang="en-US" sz="4200" b="1" dirty="0">
                 <a:solidFill>
                   <a:srgbClr val="FF6908"/>
                 </a:solidFill>
@@ -15773,7 +15773,7 @@
               <a:buNone/>
             </a:pPr>
             <a:r>
-              <a:rPr lang="en-US" sz="4800" b="1" dirty="0">
+              <a:rPr lang="en-US" sz="4200" b="1" dirty="0">
                 <a:solidFill>
                   <a:srgbClr val="FF6908"/>
                 </a:solidFill>
@@ -15907,7 +15907,7 @@
               <a:buNone/>
             </a:pPr>
             <a:r>
-              <a:rPr lang="en-US" sz="4800" b="1" dirty="0">
+              <a:rPr lang="en-US" sz="4200" b="1" dirty="0">
                 <a:solidFill>
                   <a:srgbClr val="FF6908"/>
                 </a:solidFill>
@@ -16041,7 +16041,7 @@
               <a:buNone/>
             </a:pPr>
             <a:r>
-              <a:rPr lang="en-US" sz="4800" b="1" dirty="0">
+              <a:rPr lang="en-US" sz="4200" b="1" dirty="0">
                 <a:solidFill>
                   <a:srgbClr val="FF6908"/>
                 </a:solidFill>

--- a/library/a03-video-planning/a03-video-planning.pptx
+++ b/library/a03-video-planning/a03-video-planning.pptx
@@ -20815,7 +20815,7 @@
                 </a:solidFill>
                 <a:latin typeface="Pretendard"/>
               </a:rPr>
-              <a:t>1.  저작권 © 2026 이애본(드림아이티비즈 DreamIT Biz). 발행 홍문원(洪文院, 출판사 신고번호 제2026-000026호). 2026년 1월 「생성형 AI와 창의력·복합문제능력 향상 과정」 강의안을 전자출판용으로 다시 묶은 것입니다. ISBN: 등록 후 기재.</a:t>
+              <a:t>1.  저작권 © 2026 이애본(드림아이티비즈 DreamIT Biz). 발행 홍문원(洪文院, 출판사 신고번호 제2026-000026호). 이애본이 2026년 대학·기관 강의 현장에서 쓴 강의안을 전자출판용으로 다시 묶은 것입니다. ISBN: 등록 후 기재.</a:t>
             </a:r>
           </a:p>
           <a:p>
